--- a/handoff/DeviceCluster-Briefing.pptx
+++ b/handoff/DeviceCluster-Briefing.pptx
@@ -13,6 +13,7 @@
     <p:sldId id="258" r:id="rId4"/>
     <p:sldId id="259" r:id="rId5"/>
     <p:sldId id="260" r:id="rId6"/>
+    <p:sldId id="266" r:id="rId17"/>
     <p:sldId id="261" r:id="rId7"/>
     <p:sldId id="262" r:id="rId8"/>
     <p:sldId id="263" r:id="rId9"/>
@@ -4903,7 +4904,7 @@
                 </a:solidFill>
                 <a:latin typeface="Cambria"/>
               </a:rPr>
-              <a:t>When can we use it?</a:t>
+              <a:t>Is any of it actually deployed?</a:t>
             </a:r>
           </a:p>
         </p:txBody>
@@ -4942,7 +4943,7 @@
                 </a:solidFill>
                 <a:latin typeface="Calibri"/>
               </a:rPr>
-              <a:t>Engine is ready now. Product depends on interface time plus the quota data.</a:t>
+              <a:t>Yes — the prediction service runs on our server as a Windows service. What is missing is the interface, not the engine.</a:t>
             </a:r>
           </a:p>
         </p:txBody>
@@ -5255,6 +5256,547 @@
                 <a:latin typeface="Calibri"/>
               </a:rPr>
               <a:t>Yes — quota patterns are stored per customer, so it is configuration, not a rebuild.</a:t>
+            </a:r>
+          </a:p>
+        </p:txBody>
+      </p:sp>
+    </p:spTree>
+  </p:cSld>
+  <p:clrMapOvr>
+    <a:masterClrMapping/>
+  </p:clrMapOvr>
+</p:sld>
+</file>
+
+<file path=ppt/slides/slide11.xml><?xml version="1.0" encoding="utf-8"?>
+<p:sld xmlns:a="http://schemas.openxmlformats.org/drawingml/2006/main" xmlns:r="http://schemas.openxmlformats.org/officeDocument/2006/relationships" xmlns:p="http://schemas.openxmlformats.org/presentationml/2006/main">
+  <p:cSld>
+    <p:spTree>
+      <p:nvGrpSpPr>
+        <p:cNvPr id="1" name=""/>
+        <p:cNvGrpSpPr/>
+        <p:nvPr/>
+      </p:nvGrpSpPr>
+      <p:grpSpPr>
+        <a:xfrm>
+          <a:off x="0" y="0"/>
+          <a:ext cx="0" cy="0"/>
+          <a:chOff x="0" y="0"/>
+          <a:chExt cx="0" cy="0"/>
+        </a:xfrm>
+      </p:grpSpPr>
+      <p:sp>
+        <p:nvSpPr>
+          <p:cNvPr id="2" name="Rectangle 1"/>
+          <p:cNvSpPr/>
+          <p:nvPr/>
+        </p:nvSpPr>
+        <p:spPr>
+          <a:xfrm>
+            <a:off x="0" y="0"/>
+            <a:ext cx="12191695" cy="6858000"/>
+          </a:xfrm>
+          <a:prstGeom prst="rect">
+            <a:avLst/>
+          </a:prstGeom>
+          <a:solidFill>
+            <a:srgbClr val="F2F3F4"/>
+          </a:solidFill>
+          <a:ln>
+            <a:noFill/>
+          </a:ln>
+          <a:effectLst/>
+        </p:spPr>
+        <p:style>
+          <a:lnRef idx="1">
+            <a:schemeClr val="accent1"/>
+          </a:lnRef>
+          <a:fillRef idx="3">
+            <a:schemeClr val="accent1"/>
+          </a:fillRef>
+          <a:effectRef idx="2">
+            <a:schemeClr val="accent1"/>
+          </a:effectRef>
+          <a:fontRef idx="minor">
+            <a:schemeClr val="lt1"/>
+          </a:fontRef>
+        </p:style>
+        <p:txBody>
+          <a:bodyPr rtlCol="0" anchor="ctr"/>
+          <a:lstStyle/>
+          <a:p>
+            <a:pPr algn="ctr"/>
+            <a:endParaRPr/>
+          </a:p>
+        </p:txBody>
+      </p:sp>
+      <p:sp>
+        <p:nvSpPr>
+          <p:cNvPr id="3" name="TextBox 2"/>
+          <p:cNvSpPr txBox="1"/>
+          <p:nvPr/>
+        </p:nvSpPr>
+        <p:spPr>
+          <a:xfrm>
+            <a:off x="685800" y="685800"/>
+            <a:ext cx="7772400" cy="274320"/>
+          </a:xfrm>
+          <a:prstGeom prst="rect">
+            <a:avLst/>
+          </a:prstGeom>
+          <a:noFill/>
+        </p:spPr>
+        <p:txBody>
+          <a:bodyPr wrap="square" lIns="0" tIns="0" rIns="0" bIns="0" anchor="t">
+            <a:spAutoFit/>
+          </a:bodyPr>
+          <a:lstStyle/>
+          <a:p>
+            <a:pPr algn="l">
+              <a:lnSpc>
+                <a:spcPct val="100000"/>
+              </a:lnSpc>
+            </a:pPr>
+            <a:r>
+              <a:rPr sz="1050" b="1" i="0">
+                <a:solidFill>
+                  <a:srgbClr val="C46A24"/>
+                </a:solidFill>
+                <a:latin typeface="Consolas"/>
+              </a:rPr>
+              <a:t>04 · WHERE IT RUNS</a:t>
+            </a:r>
+          </a:p>
+        </p:txBody>
+      </p:sp>
+      <p:sp>
+        <p:nvSpPr>
+          <p:cNvPr id="4" name="TextBox 3"/>
+          <p:cNvSpPr txBox="1"/>
+          <p:nvPr/>
+        </p:nvSpPr>
+        <p:spPr>
+          <a:xfrm>
+            <a:off x="685800" y="1069848"/>
+            <a:ext cx="10241280" cy="914400"/>
+          </a:xfrm>
+          <a:prstGeom prst="rect">
+            <a:avLst/>
+          </a:prstGeom>
+          <a:noFill/>
+        </p:spPr>
+        <p:txBody>
+          <a:bodyPr wrap="square" lIns="0" tIns="0" rIns="0" bIns="0" anchor="t">
+            <a:spAutoFit/>
+          </a:bodyPr>
+          <a:lstStyle/>
+          <a:p>
+            <a:pPr algn="l">
+              <a:lnSpc>
+                <a:spcPct val="95000"/>
+              </a:lnSpc>
+            </a:pPr>
+            <a:r>
+              <a:rPr sz="3600" b="1" i="0">
+                <a:solidFill>
+                  <a:srgbClr val="171A1D"/>
+                </a:solidFill>
+                <a:latin typeface="Cambria"/>
+              </a:rPr>
+              <a:t>Deployed across two servers</a:t>
+            </a:r>
+          </a:p>
+        </p:txBody>
+      </p:sp>
+      <p:sp>
+        <p:nvSpPr>
+          <p:cNvPr id="5" name="Oval 4"/>
+          <p:cNvSpPr/>
+          <p:nvPr/>
+        </p:nvSpPr>
+        <p:spPr>
+          <a:xfrm>
+            <a:off x="685800" y="2203704"/>
+            <a:ext cx="512064" cy="512064"/>
+          </a:xfrm>
+          <a:prstGeom prst="ellipse">
+            <a:avLst/>
+          </a:prstGeom>
+          <a:solidFill>
+            <a:srgbClr val="C46A24"/>
+          </a:solidFill>
+          <a:ln>
+            <a:noFill/>
+          </a:ln>
+          <a:effectLst/>
+        </p:spPr>
+        <p:style>
+          <a:lnRef idx="1">
+            <a:schemeClr val="accent1"/>
+          </a:lnRef>
+          <a:fillRef idx="3">
+            <a:schemeClr val="accent1"/>
+          </a:fillRef>
+          <a:effectRef idx="2">
+            <a:schemeClr val="accent1"/>
+          </a:effectRef>
+          <a:fontRef idx="minor">
+            <a:schemeClr val="lt1"/>
+          </a:fontRef>
+        </p:style>
+        <p:txBody>
+          <a:bodyPr lIns="0" tIns="0" rIns="0" bIns="0" rtlCol="0" anchor="ctr"/>
+          <a:lstStyle/>
+          <a:p>
+            <a:pPr algn="ctr"/>
+            <a:r>
+              <a:rPr sz="1600" b="1">
+                <a:solidFill>
+                  <a:srgbClr val="FFFFFF"/>
+                </a:solidFill>
+                <a:latin typeface="Consolas"/>
+              </a:rPr>
+              <a:t>1</a:t>
+            </a:r>
+          </a:p>
+        </p:txBody>
+      </p:sp>
+      <p:sp>
+        <p:nvSpPr>
+          <p:cNvPr id="6" name="TextBox 5"/>
+          <p:cNvSpPr txBox="1"/>
+          <p:nvPr/>
+        </p:nvSpPr>
+        <p:spPr>
+          <a:xfrm>
+            <a:off x="1472184" y="2167128"/>
+            <a:ext cx="3657600" cy="320040"/>
+          </a:xfrm>
+          <a:prstGeom prst="rect">
+            <a:avLst/>
+          </a:prstGeom>
+          <a:noFill/>
+        </p:spPr>
+        <p:txBody>
+          <a:bodyPr wrap="square" lIns="0" tIns="0" rIns="0" bIns="0" anchor="t">
+            <a:spAutoFit/>
+          </a:bodyPr>
+          <a:lstStyle/>
+          <a:p>
+            <a:pPr algn="l">
+              <a:lnSpc>
+                <a:spcPct val="100000"/>
+              </a:lnSpc>
+            </a:pPr>
+            <a:r>
+              <a:rPr sz="1700" b="1" i="0">
+                <a:solidFill>
+                  <a:srgbClr val="171A1D"/>
+                </a:solidFill>
+                <a:latin typeface="Cambria"/>
+              </a:rPr>
+              <a:t>The models run on a server</a:t>
+            </a:r>
+          </a:p>
+        </p:txBody>
+      </p:sp>
+      <p:sp>
+        <p:nvSpPr>
+          <p:cNvPr id="7" name="TextBox 6"/>
+          <p:cNvSpPr txBox="1"/>
+          <p:nvPr/>
+        </p:nvSpPr>
+        <p:spPr>
+          <a:xfrm>
+            <a:off x="1472184" y="2532888"/>
+            <a:ext cx="9966960" cy="658368"/>
+          </a:xfrm>
+          <a:prstGeom prst="rect">
+            <a:avLst/>
+          </a:prstGeom>
+          <a:noFill/>
+        </p:spPr>
+        <p:txBody>
+          <a:bodyPr wrap="square" lIns="0" tIns="0" rIns="0" bIns="0" anchor="t">
+            <a:spAutoFit/>
+          </a:bodyPr>
+          <a:lstStyle/>
+          <a:p>
+            <a:pPr algn="l">
+              <a:lnSpc>
+                <a:spcPct val="122000"/>
+              </a:lnSpc>
+            </a:pPr>
+            <a:r>
+              <a:rPr sz="1400" b="0" i="0">
+                <a:solidFill>
+                  <a:srgbClr val="67717C"/>
+                </a:solidFill>
+                <a:latin typeface="Calibri"/>
+              </a:rPr>
+              <a:t>They are loaded into memory once and answer requests over the network. No engineer machine needs Python or the model files installed, and predictions are roughly ten times faster than before.</a:t>
+            </a:r>
+          </a:p>
+        </p:txBody>
+      </p:sp>
+      <p:sp>
+        <p:nvSpPr>
+          <p:cNvPr id="8" name="Oval 7"/>
+          <p:cNvSpPr/>
+          <p:nvPr/>
+        </p:nvSpPr>
+        <p:spPr>
+          <a:xfrm>
+            <a:off x="685800" y="3374135"/>
+            <a:ext cx="512064" cy="512064"/>
+          </a:xfrm>
+          <a:prstGeom prst="ellipse">
+            <a:avLst/>
+          </a:prstGeom>
+          <a:solidFill>
+            <a:srgbClr val="C46A24"/>
+          </a:solidFill>
+          <a:ln>
+            <a:noFill/>
+          </a:ln>
+          <a:effectLst/>
+        </p:spPr>
+        <p:style>
+          <a:lnRef idx="1">
+            <a:schemeClr val="accent1"/>
+          </a:lnRef>
+          <a:fillRef idx="3">
+            <a:schemeClr val="accent1"/>
+          </a:fillRef>
+          <a:effectRef idx="2">
+            <a:schemeClr val="accent1"/>
+          </a:effectRef>
+          <a:fontRef idx="minor">
+            <a:schemeClr val="lt1"/>
+          </a:fontRef>
+        </p:style>
+        <p:txBody>
+          <a:bodyPr lIns="0" tIns="0" rIns="0" bIns="0" rtlCol="0" anchor="ctr"/>
+          <a:lstStyle/>
+          <a:p>
+            <a:pPr algn="ctr"/>
+            <a:r>
+              <a:rPr sz="1600" b="1">
+                <a:solidFill>
+                  <a:srgbClr val="FFFFFF"/>
+                </a:solidFill>
+                <a:latin typeface="Consolas"/>
+              </a:rPr>
+              <a:t>2</a:t>
+            </a:r>
+          </a:p>
+        </p:txBody>
+      </p:sp>
+      <p:sp>
+        <p:nvSpPr>
+          <p:cNvPr id="9" name="TextBox 8"/>
+          <p:cNvSpPr txBox="1"/>
+          <p:nvPr/>
+        </p:nvSpPr>
+        <p:spPr>
+          <a:xfrm>
+            <a:off x="1472184" y="3337560"/>
+            <a:ext cx="3657600" cy="320040"/>
+          </a:xfrm>
+          <a:prstGeom prst="rect">
+            <a:avLst/>
+          </a:prstGeom>
+          <a:noFill/>
+        </p:spPr>
+        <p:txBody>
+          <a:bodyPr wrap="square" lIns="0" tIns="0" rIns="0" bIns="0" anchor="t">
+            <a:spAutoFit/>
+          </a:bodyPr>
+          <a:lstStyle/>
+          <a:p>
+            <a:pPr algn="l">
+              <a:lnSpc>
+                <a:spcPct val="100000"/>
+              </a:lnSpc>
+            </a:pPr>
+            <a:r>
+              <a:rPr sz="1700" b="1" i="0">
+                <a:solidFill>
+                  <a:srgbClr val="171A1D"/>
+                </a:solidFill>
+                <a:latin typeface="Cambria"/>
+              </a:rPr>
+              <a:t>The database is company-shared</a:t>
+            </a:r>
+          </a:p>
+        </p:txBody>
+      </p:sp>
+      <p:sp>
+        <p:nvSpPr>
+          <p:cNvPr id="10" name="TextBox 9"/>
+          <p:cNvSpPr txBox="1"/>
+          <p:nvPr/>
+        </p:nvSpPr>
+        <p:spPr>
+          <a:xfrm>
+            <a:off x="1472184" y="3703320"/>
+            <a:ext cx="9966960" cy="658368"/>
+          </a:xfrm>
+          <a:prstGeom prst="rect">
+            <a:avLst/>
+          </a:prstGeom>
+          <a:noFill/>
+        </p:spPr>
+        <p:txBody>
+          <a:bodyPr wrap="square" lIns="0" tIns="0" rIns="0" bIns="0" anchor="t">
+            <a:spAutoFit/>
+          </a:bodyPr>
+          <a:lstStyle/>
+          <a:p>
+            <a:pPr algn="l">
+              <a:lnSpc>
+                <a:spcPct val="122000"/>
+              </a:lnSpc>
+            </a:pPr>
+            <a:r>
+              <a:rPr sz="1400" b="0" i="0">
+                <a:solidFill>
+                  <a:srgbClr val="67717C"/>
+                </a:solidFill>
+                <a:latin typeface="Calibri"/>
+              </a:rPr>
+              <a:t>Everything the system produces is written to SQL Server on the company database server. The interface will read results from there, not from files passed between machines.</a:t>
+            </a:r>
+          </a:p>
+        </p:txBody>
+      </p:sp>
+      <p:sp>
+        <p:nvSpPr>
+          <p:cNvPr id="11" name="Oval 10"/>
+          <p:cNvSpPr/>
+          <p:nvPr/>
+        </p:nvSpPr>
+        <p:spPr>
+          <a:xfrm>
+            <a:off x="685800" y="4544568"/>
+            <a:ext cx="512064" cy="512064"/>
+          </a:xfrm>
+          <a:prstGeom prst="ellipse">
+            <a:avLst/>
+          </a:prstGeom>
+          <a:solidFill>
+            <a:srgbClr val="2E7D63"/>
+          </a:solidFill>
+          <a:ln>
+            <a:noFill/>
+          </a:ln>
+          <a:effectLst/>
+        </p:spPr>
+        <p:style>
+          <a:lnRef idx="1">
+            <a:schemeClr val="accent1"/>
+          </a:lnRef>
+          <a:fillRef idx="3">
+            <a:schemeClr val="accent1"/>
+          </a:fillRef>
+          <a:effectRef idx="2">
+            <a:schemeClr val="accent1"/>
+          </a:effectRef>
+          <a:fontRef idx="minor">
+            <a:schemeClr val="lt1"/>
+          </a:fontRef>
+        </p:style>
+        <p:txBody>
+          <a:bodyPr lIns="0" tIns="0" rIns="0" bIns="0" rtlCol="0" anchor="ctr"/>
+          <a:lstStyle/>
+          <a:p>
+            <a:pPr algn="ctr"/>
+            <a:r>
+              <a:rPr sz="1600" b="1">
+                <a:solidFill>
+                  <a:srgbClr val="FFFFFF"/>
+                </a:solidFill>
+                <a:latin typeface="Consolas"/>
+              </a:rPr>
+              <a:t>3</a:t>
+            </a:r>
+          </a:p>
+        </p:txBody>
+      </p:sp>
+      <p:sp>
+        <p:nvSpPr>
+          <p:cNvPr id="12" name="TextBox 11"/>
+          <p:cNvSpPr txBox="1"/>
+          <p:nvPr/>
+        </p:nvSpPr>
+        <p:spPr>
+          <a:xfrm>
+            <a:off x="1472184" y="4507992"/>
+            <a:ext cx="3657600" cy="320040"/>
+          </a:xfrm>
+          <a:prstGeom prst="rect">
+            <a:avLst/>
+          </a:prstGeom>
+          <a:noFill/>
+        </p:spPr>
+        <p:txBody>
+          <a:bodyPr wrap="square" lIns="0" tIns="0" rIns="0" bIns="0" anchor="t">
+            <a:spAutoFit/>
+          </a:bodyPr>
+          <a:lstStyle/>
+          <a:p>
+            <a:pPr algn="l">
+              <a:lnSpc>
+                <a:spcPct val="100000"/>
+              </a:lnSpc>
+            </a:pPr>
+            <a:r>
+              <a:rPr sz="1700" b="1" i="0">
+                <a:solidFill>
+                  <a:srgbClr val="171A1D"/>
+                </a:solidFill>
+                <a:latin typeface="Cambria"/>
+              </a:rPr>
+              <a:t>The developer builds from source</a:t>
+            </a:r>
+          </a:p>
+        </p:txBody>
+      </p:sp>
+      <p:sp>
+        <p:nvSpPr>
+          <p:cNvPr id="13" name="TextBox 12"/>
+          <p:cNvSpPr txBox="1"/>
+          <p:nvPr/>
+        </p:nvSpPr>
+        <p:spPr>
+          <a:xfrm>
+            <a:off x="1472184" y="4873752"/>
+            <a:ext cx="9966960" cy="658368"/>
+          </a:xfrm>
+          <a:prstGeom prst="rect">
+            <a:avLst/>
+          </a:prstGeom>
+          <a:noFill/>
+        </p:spPr>
+        <p:txBody>
+          <a:bodyPr wrap="square" lIns="0" tIns="0" rIns="0" bIns="0" anchor="t">
+            <a:spAutoFit/>
+          </a:bodyPr>
+          <a:lstStyle/>
+          <a:p>
+            <a:pPr algn="l">
+              <a:lnSpc>
+                <a:spcPct val="122000"/>
+              </a:lnSpc>
+            </a:pPr>
+            <a:r>
+              <a:rPr sz="1400" b="0" i="0">
+                <a:solidFill>
+                  <a:srgbClr val="67717C"/>
+                </a:solidFill>
+                <a:latin typeface="Calibri"/>
+              </a:rPr>
+              <a:t>The code is in Azure DevOps. The software developer clones it and builds — nothing is emailed, and there is no package to keep re-sending each time something changes.</a:t>
             </a:r>
           </a:p>
         </p:txBody>
@@ -6225,7 +6767,7 @@
                 </a:solidFill>
                 <a:latin typeface="Cambria"/>
               </a:rPr>
-              <a:t>Identify the device</a:t>
+              <a:t>Identify the device — by rule</a:t>
             </a:r>
           </a:p>
         </p:txBody>
@@ -6264,7 +6806,7 @@
                 </a:solidFill>
                 <a:latin typeface="Calibri"/>
               </a:rPr>
-              <a:t>The first model reads the tag pattern and determines what the device actually is — heater, valve, transmitter.</a:t>
+              <a:t>The leading letters of a tag are looked up in a reference table an engineer owns — 92 prefixes covering 23 device types. A match is certain; anything unrecognised is sent for review rather than guessed.</a:t>
             </a:r>
           </a:p>
         </p:txBody>
@@ -6395,7 +6937,7 @@
                 </a:solidFill>
                 <a:latin typeface="Calibri"/>
               </a:rPr>
-              <a:t>The second model places it. It returns a ranked list of candidates with a confidence score against each — not a single answer.</a:t>
+              <a:t>Here we do use machine learning. Two chained models return a ranked list of candidate sections and clusters with a confidence score against each — not a single answer.</a:t>
             </a:r>
           </a:p>
         </p:txBody>
@@ -7484,7 +8026,7 @@
                 </a:solidFill>
                 <a:latin typeface="Calibri"/>
               </a:rPr>
-              <a:t>Tested end to end against a live database and the real trained models — not simulated, not stubbed.</a:t>
+              <a:t>Tested against a live database and the real trained models — server and local runs agree exactly.</a:t>
             </a:r>
           </a:p>
         </p:txBody>
@@ -7664,7 +8206,7 @@
                 </a:solidFill>
                 <a:latin typeface="Calibri"/>
               </a:rPr>
-              <a:t>The developer building the interface does not need to understand any of the internals. They call one method and receive the results.</a:t>
+              <a:t>The developer building the interface does not need to understand the internals. They call one method and receive the results — from the server or locally.</a:t>
             </a:r>
           </a:p>
         </p:txBody>
@@ -9521,7 +10063,7 @@
                 </a:solidFill>
                 <a:latin typeface="Calibri"/>
               </a:rPr>
-              <a:t>The handover package is complete and documented. The software developer can begin immediately.</a:t>
+              <a:t>The libraries, the documentation and the deployment steps are all in source control, and a fresh clone builds cleanly. The software developer can begin immediately.</a:t>
             </a:r>
           </a:p>
         </p:txBody>

--- a/handoff/DeviceCluster-Briefing.pptx
+++ b/handoff/DeviceCluster-Briefing.pptx
@@ -4943,7 +4943,7 @@
                 </a:solidFill>
                 <a:latin typeface="Calibri"/>
               </a:rPr>
-              <a:t>Yes — the prediction service runs on our server as a Windows service. What is missing is the interface, not the engine.</a:t>
+              <a:t>Yes — running as a Windows service, set to start automatically. Not yet proven: that it comes back after a full server restart.</a:t>
             </a:r>
           </a:p>
         </p:txBody>
